--- a/metro/metro-x04-feature-sheet.pptx
+++ b/metro/metro-x04-feature-sheet.pptx
@@ -3734,9 +3734,9 @@
                 <a:solidFill>
                   <a:srgbClr val="14161A"/>
                 </a:solidFill>
-                <a:latin typeface="Space Grotesk"/>
-                <a:ea typeface="Space Grotesk"/>
-                <a:cs typeface="Space Grotesk"/>
+                <a:latin typeface="HK Grotesk"/>
+                <a:ea typeface="HK Grotesk"/>
+                <a:cs typeface="HK Grotesk"/>
               </a:rPr>
               <a:t>NO</a:t>
             </a:r>
@@ -3773,9 +3773,9 @@
                 <a:solidFill>
                   <a:srgbClr val="14161A"/>
                 </a:solidFill>
-                <a:latin typeface="Space Grotesk"/>
-                <a:ea typeface="Space Grotesk"/>
-                <a:cs typeface="Space Grotesk"/>
+                <a:latin typeface="HK Grotesk"/>
+                <a:ea typeface="HK Grotesk"/>
+                <a:cs typeface="HK Grotesk"/>
               </a:rPr>
               <a:t>North &amp; Oak</a:t>
             </a:r>
@@ -3882,9 +3882,9 @@
                 <a:solidFill>
                   <a:srgbClr val="14161A"/>
                 </a:solidFill>
-                <a:latin typeface="Space Grotesk"/>
-                <a:ea typeface="Space Grotesk"/>
-                <a:cs typeface="Space Grotesk"/>
+                <a:latin typeface="HK Grotesk"/>
+                <a:ea typeface="HK Grotesk"/>
+                <a:cs typeface="HK Grotesk"/>
               </a:rPr>
               <a:t>1200 N Wells, 14C</a:t>
             </a:r>
@@ -3917,9 +3917,9 @@
                 <a:solidFill>
                   <a:srgbClr val="2D5BE3"/>
                 </a:solidFill>
-                <a:latin typeface="Space Grotesk"/>
-                <a:ea typeface="Space Grotesk"/>
-                <a:cs typeface="Space Grotesk"/>
+                <a:latin typeface="HK Grotesk"/>
+                <a:ea typeface="HK Grotesk"/>
+                <a:cs typeface="HK Grotesk"/>
               </a:rPr>
               <a:t>$895,000</a:t>
             </a:r>
@@ -3952,9 +3952,9 @@
                 <a:solidFill>
                   <a:srgbClr val="8A8F99"/>
                 </a:solidFill>
-                <a:latin typeface="Space Grotesk"/>
-                <a:ea typeface="Space Grotesk"/>
-                <a:cs typeface="Space Grotesk"/>
+                <a:latin typeface="HK Grotesk"/>
+                <a:ea typeface="HK Grotesk"/>
+                <a:cs typeface="HK Grotesk"/>
               </a:rPr>
               <a:t>2 BD · 2 BA · 1,480 SF · 14th flr</a:t>
             </a:r>
@@ -3991,9 +3991,9 @@
                 <a:solidFill>
                   <a:srgbClr val="2D5BE3"/>
                 </a:solidFill>
-                <a:latin typeface="Space Grotesk"/>
-                <a:ea typeface="Space Grotesk"/>
-                <a:cs typeface="Space Grotesk"/>
+                <a:latin typeface="HK Grotesk"/>
+                <a:ea typeface="HK Grotesk"/>
+                <a:cs typeface="HK Grotesk"/>
               </a:rPr>
               <a:t>01</a:t>
             </a:r>
@@ -4026,9 +4026,9 @@
                 <a:solidFill>
                   <a:srgbClr val="14161A"/>
                 </a:solidFill>
-                <a:latin typeface="Space Grotesk"/>
-                <a:ea typeface="Space Grotesk"/>
-                <a:cs typeface="Space Grotesk"/>
+                <a:latin typeface="HK Grotesk"/>
+                <a:ea typeface="HK Grotesk"/>
+                <a:cs typeface="HK Grotesk"/>
               </a:rPr>
               <a:t>Chef’s kitchen</a:t>
             </a:r>
@@ -4065,9 +4065,9 @@
                 <a:solidFill>
                   <a:srgbClr val="8A8F99"/>
                 </a:solidFill>
-                <a:latin typeface="Space Grotesk"/>
-                <a:ea typeface="Space Grotesk"/>
-                <a:cs typeface="Space Grotesk"/>
+                <a:latin typeface="HK Grotesk"/>
+                <a:ea typeface="HK Grotesk"/>
+                <a:cs typeface="HK Grotesk"/>
               </a:rPr>
               <a:t>Quartz waterfall island, Bosch appliances, integrated panels.</a:t>
             </a:r>
@@ -4104,9 +4104,9 @@
                 <a:solidFill>
                   <a:srgbClr val="2D5BE3"/>
                 </a:solidFill>
-                <a:latin typeface="Space Grotesk"/>
-                <a:ea typeface="Space Grotesk"/>
-                <a:cs typeface="Space Grotesk"/>
+                <a:latin typeface="HK Grotesk"/>
+                <a:ea typeface="HK Grotesk"/>
+                <a:cs typeface="HK Grotesk"/>
               </a:rPr>
               <a:t>02</a:t>
             </a:r>
@@ -4139,9 +4139,9 @@
                 <a:solidFill>
                   <a:srgbClr val="14161A"/>
                 </a:solidFill>
-                <a:latin typeface="Space Grotesk"/>
-                <a:ea typeface="Space Grotesk"/>
-                <a:cs typeface="Space Grotesk"/>
+                <a:latin typeface="HK Grotesk"/>
+                <a:ea typeface="HK Grotesk"/>
+                <a:cs typeface="HK Grotesk"/>
               </a:rPr>
               <a:t>Primary suite</a:t>
             </a:r>
@@ -4178,9 +4178,9 @@
                 <a:solidFill>
                   <a:srgbClr val="8A8F99"/>
                 </a:solidFill>
-                <a:latin typeface="Space Grotesk"/>
-                <a:ea typeface="Space Grotesk"/>
-                <a:cs typeface="Space Grotesk"/>
+                <a:latin typeface="HK Grotesk"/>
+                <a:ea typeface="HK Grotesk"/>
+                <a:cs typeface="HK Grotesk"/>
               </a:rPr>
               <a:t>Spa bath, soaking tub, dual vanities, skyline outlook.</a:t>
             </a:r>
@@ -4217,9 +4217,9 @@
                 <a:solidFill>
                   <a:srgbClr val="2D5BE3"/>
                 </a:solidFill>
-                <a:latin typeface="Space Grotesk"/>
-                <a:ea typeface="Space Grotesk"/>
-                <a:cs typeface="Space Grotesk"/>
+                <a:latin typeface="HK Grotesk"/>
+                <a:ea typeface="HK Grotesk"/>
+                <a:cs typeface="HK Grotesk"/>
               </a:rPr>
               <a:t>03</a:t>
             </a:r>
@@ -4252,9 +4252,9 @@
                 <a:solidFill>
                   <a:srgbClr val="14161A"/>
                 </a:solidFill>
-                <a:latin typeface="Space Grotesk"/>
-                <a:ea typeface="Space Grotesk"/>
-                <a:cs typeface="Space Grotesk"/>
+                <a:latin typeface="HK Grotesk"/>
+                <a:ea typeface="HK Grotesk"/>
+                <a:cs typeface="HK Grotesk"/>
               </a:rPr>
               <a:t>Outdoor</a:t>
             </a:r>
@@ -4291,9 +4291,9 @@
                 <a:solidFill>
                   <a:srgbClr val="8A8F99"/>
                 </a:solidFill>
-                <a:latin typeface="Space Grotesk"/>
-                <a:ea typeface="Space Grotesk"/>
-                <a:cs typeface="Space Grotesk"/>
+                <a:latin typeface="HK Grotesk"/>
+                <a:ea typeface="HK Grotesk"/>
+                <a:cs typeface="HK Grotesk"/>
               </a:rPr>
               <a:t>Private balcony and skyline terrace.</a:t>
             </a:r>
@@ -4330,9 +4330,9 @@
                 <a:solidFill>
                   <a:srgbClr val="2D5BE3"/>
                 </a:solidFill>
-                <a:latin typeface="Space Grotesk"/>
-                <a:ea typeface="Space Grotesk"/>
-                <a:cs typeface="Space Grotesk"/>
+                <a:latin typeface="HK Grotesk"/>
+                <a:ea typeface="HK Grotesk"/>
+                <a:cs typeface="HK Grotesk"/>
               </a:rPr>
               <a:t>04</a:t>
             </a:r>
@@ -4365,9 +4365,9 @@
                 <a:solidFill>
                   <a:srgbClr val="14161A"/>
                 </a:solidFill>
-                <a:latin typeface="Space Grotesk"/>
-                <a:ea typeface="Space Grotesk"/>
-                <a:cs typeface="Space Grotesk"/>
+                <a:latin typeface="HK Grotesk"/>
+                <a:ea typeface="HK Grotesk"/>
+                <a:cs typeface="HK Grotesk"/>
               </a:rPr>
               <a:t>Smart systems</a:t>
             </a:r>
@@ -4404,9 +4404,9 @@
                 <a:solidFill>
                   <a:srgbClr val="8A8F99"/>
                 </a:solidFill>
-                <a:latin typeface="Space Grotesk"/>
-                <a:ea typeface="Space Grotesk"/>
-                <a:cs typeface="Space Grotesk"/>
+                <a:latin typeface="HK Grotesk"/>
+                <a:ea typeface="HK Grotesk"/>
+                <a:cs typeface="HK Grotesk"/>
               </a:rPr>
               <a:t>Smart-home automation, integrated audio, climate.</a:t>
             </a:r>
@@ -4443,9 +4443,9 @@
                 <a:solidFill>
                   <a:srgbClr val="2D5BE3"/>
                 </a:solidFill>
-                <a:latin typeface="Space Grotesk"/>
-                <a:ea typeface="Space Grotesk"/>
-                <a:cs typeface="Space Grotesk"/>
+                <a:latin typeface="HK Grotesk"/>
+                <a:ea typeface="HK Grotesk"/>
+                <a:cs typeface="HK Grotesk"/>
               </a:rPr>
               <a:t>05</a:t>
             </a:r>
@@ -4478,9 +4478,9 @@
                 <a:solidFill>
                   <a:srgbClr val="14161A"/>
                 </a:solidFill>
-                <a:latin typeface="Space Grotesk"/>
-                <a:ea typeface="Space Grotesk"/>
-                <a:cs typeface="Space Grotesk"/>
+                <a:latin typeface="HK Grotesk"/>
+                <a:ea typeface="HK Grotesk"/>
+                <a:cs typeface="HK Grotesk"/>
               </a:rPr>
               <a:t>Skyline views</a:t>
             </a:r>
@@ -4517,9 +4517,9 @@
                 <a:solidFill>
                   <a:srgbClr val="8A8F99"/>
                 </a:solidFill>
-                <a:latin typeface="Space Grotesk"/>
-                <a:ea typeface="Space Grotesk"/>
-                <a:cs typeface="Space Grotesk"/>
+                <a:latin typeface="HK Grotesk"/>
+                <a:ea typeface="HK Grotesk"/>
+                <a:cs typeface="HK Grotesk"/>
               </a:rPr>
               <a:t>Floor-to-ceiling glazing onto the river.</a:t>
             </a:r>
@@ -4556,9 +4556,9 @@
                 <a:solidFill>
                   <a:srgbClr val="2D5BE3"/>
                 </a:solidFill>
-                <a:latin typeface="Space Grotesk"/>
-                <a:ea typeface="Space Grotesk"/>
-                <a:cs typeface="Space Grotesk"/>
+                <a:latin typeface="HK Grotesk"/>
+                <a:ea typeface="HK Grotesk"/>
+                <a:cs typeface="HK Grotesk"/>
               </a:rPr>
               <a:t>06</a:t>
             </a:r>
@@ -4591,9 +4591,9 @@
                 <a:solidFill>
                   <a:srgbClr val="14161A"/>
                 </a:solidFill>
-                <a:latin typeface="Space Grotesk"/>
-                <a:ea typeface="Space Grotesk"/>
-                <a:cs typeface="Space Grotesk"/>
+                <a:latin typeface="HK Grotesk"/>
+                <a:ea typeface="HK Grotesk"/>
+                <a:cs typeface="HK Grotesk"/>
               </a:rPr>
               <a:t>Building</a:t>
             </a:r>
@@ -4630,9 +4630,9 @@
                 <a:solidFill>
                   <a:srgbClr val="8A8F99"/>
                 </a:solidFill>
-                <a:latin typeface="Space Grotesk"/>
-                <a:ea typeface="Space Grotesk"/>
-                <a:cs typeface="Space Grotesk"/>
+                <a:latin typeface="HK Grotesk"/>
+                <a:ea typeface="HK Grotesk"/>
+                <a:cs typeface="HK Grotesk"/>
               </a:rPr>
               <a:t>Heated garage space, storage cage, bike room.</a:t>
             </a:r>
